--- a/examples/03-llmind/redraw.pptx
+++ b/examples/03-llmind/redraw.pptx
@@ -6355,7 +6355,7 @@
                 </a:solidFill>
                 <a:latin typeface="STIXGeneral"/>
               </a:rPr>
-              <a:t>Î = E</a:t>
+              <a:t>Î = 𝔼</a:t>
             </a:r>
             <a:r>
               <a:rPr sz="900" i="1" baseline="-25000">

--- a/examples/03-llmind/redraw.pptx
+++ b/examples/03-llmind/redraw.pptx
@@ -3242,6 +3242,10 @@
             </a:solidFill>
           </a:ln>
         </p:spPr>
+        <p:txBody>
+          <a:bodyPr/>
+          <a:p/>
+        </p:txBody>
       </p:sp>
       <p:sp>
         <p:nvSpPr>
@@ -3278,6 +3282,10 @@
             </a:solidFill>
           </a:ln>
         </p:spPr>
+        <p:txBody>
+          <a:bodyPr/>
+          <a:p/>
+        </p:txBody>
       </p:sp>
       <p:sp>
         <p:nvSpPr>
@@ -3317,70 +3325,142 @@
             </a:solidFill>
           </a:ln>
         </p:spPr>
-      </p:sp>
-      <p:sp>
-        <p:nvSpPr>
-          <p:cNvPr id="8" name="TextBox 7"/>
-          <p:cNvSpPr txBox="1"/>
-          <p:nvPr/>
-        </p:nvSpPr>
-        <p:spPr>
-          <a:xfrm rot="16200000">
-            <a:off x="219837" y="1020366"/>
-            <a:ext cx="608076" cy="226219"/>
-          </a:xfrm>
-          <a:prstGeom prst="rect">
-            <a:avLst/>
-          </a:prstGeom>
-          <a:noFill/>
-          <a:effectLst/>
-        </p:spPr>
-        <p:txBody>
-          <a:bodyPr wrap="none" anchor="ctr" lIns="0" rIns="0" tIns="0" bIns="0">
-            <a:spAutoFit/>
-          </a:bodyPr>
-          <a:lstStyle/>
-          <a:p>
-            <a:pPr algn="ctr"/>
-            <a:r>
-              <a:rPr sz="1425" i="1">
-                <a:solidFill>
-                  <a:srgbClr val="000000"/>
-                </a:solidFill>
-                <a:latin typeface="STIXGeneral"/>
-              </a:rPr>
-              <a:t>∇</a:t>
-            </a:r>
-            <a:r>
-              <a:rPr sz="900" i="1" baseline="-25000">
-                <a:solidFill>
-                  <a:srgbClr val="000000"/>
-                </a:solidFill>
-                <a:latin typeface="STIXGeneral"/>
-              </a:rPr>
-              <a:t>θ</a:t>
-            </a:r>
-            <a:r>
-              <a:rPr sz="1425" i="1">
-                <a:solidFill>
-                  <a:srgbClr val="000000"/>
-                </a:solidFill>
-                <a:latin typeface="STIXGeneral"/>
-              </a:rPr>
-              <a:t> ℒ</a:t>
-            </a:r>
-            <a:r>
-              <a:rPr sz="900" i="1" baseline="-25000">
-                <a:solidFill>
-                  <a:srgbClr val="000000"/>
-                </a:solidFill>
-                <a:latin typeface="STIXGeneral"/>
-              </a:rPr>
-              <a:t>ext</a:t>
-            </a:r>
-          </a:p>
-        </p:txBody>
-      </p:sp>
+        <p:txBody>
+          <a:bodyPr/>
+          <a:p/>
+        </p:txBody>
+      </p:sp>
+      <mc:AlternateContent xmlns:mc="http://schemas.openxmlformats.org/markup-compatibility/2006">
+        <mc:Choice xmlns:a14="http://schemas.microsoft.com/office/drawing/2010/main" Requires="a14">
+          <p:sp>
+            <p:nvSpPr>
+              <p:cNvPr id="8" name="math:001" descr="AI_AUTOFIGURE_NATIVE_MATH_V1:eyJjb250ZW50X3J1bnMiOlt7ImNhbm9uaWNhbF9sYXRleCI6IlxcbmFibGFfe1xcdGhldGF9IFxcbWF0aGNhbHtMfV97dGV4dH0iLCJmb3JtdWxhX2lkIjoiRVEwMDEiLCJraW5kIjoibWF0aCIsImxhdGV4X3NoYTI1NiI6IjM0NTVkMzY5YTAwODk2ZDUxZjI1NzNlYjIzN2ZmNjlkMWNjYzMzOThhMzg3ZTQ0ZGE0NTI2MDFiYzA0Yjg5NjAiLCJtb2RlIjoiaW5saW5lIiwib21tbF9zaGEyNTYiOiI4ZjU5NjRkNDYwZGE3NWYxZGJmYTE0MWY3ZjMxNTc2NjE4OTEyM2ExMTQ0NWMzYTU5ZDc4NTQyMTI0Nzg3MDBmIiwic2VtYW50aWNfb21tbF9wcm9maWxlIjoib2ZmaWNlLW1hdGgtc2VtYW50aWMtdjIiLCJzZW1hbnRpY19vbW1sX3NoYTI1NiI6IjY3NjhkNjcxNDllNzE5NDcxZjgyMmYwN2IxZTFlMGFiZTIyOGZiYjAzOGM4MmJhYWE0YjU1OWJlMzJjMTliNTQifV0sImZvcm11bGFzIjpbeyJjYW5vbmljYWxfbGF0ZXgiOiJcXG5hYmxhX3tcXHRoZXRhfSBcXG1hdGhjYWx7TH1fe3RleHR9IiwiZm9ybXVsYV9pZCI6IkVRMDAxIiwibGF0ZXhfc2hhMjU2IjoiMzQ1NWQzNjlhMDA4OTZkNTFmMjU3M2ViMjM3ZmY2OWQxY2NjMzM5OGEzODdlNDRkYTQ1MjYwMWJjMDRiODk2MCIsIm1vZGUiOiJpbmxpbmUiLCJvbW1sX3NoYTI1NiI6IjhmNTk2NGQ0NjBkYTc1ZjFkYmZhMTQxZjdmMzE1NzY2MTg5MTIzYTExNDQ1YzNhNTlkNzg1NDIxMjQ3ODcwMGYiLCJzZW1hbnRpY19vbW1sX3Byb2ZpbGUiOiJvZmZpY2UtbWF0aC1zZW1hbnRpYy12MiIsInNlbWFudGljX29tbWxfc2hhMjU2IjoiNjc2OGQ2NzE0OWU3MTk0NzFmODIyZjA3YjFlMWUwYWJlMjI4ZmJiMDM4YzgyYmFhYTRiNTU5YmUzMmMxOWI1NCJ9XSwia2luZCI6Im5hdGl2ZV9vZmZpY2VfbWF0aCIsInBsYWNlaG9sZGVyX25hbWUiOiJtYXRoOjAwMSIsInNjaGVtYV92ZXJzaW9uIjoiMS4wIn0="/>
+              <p:cNvSpPr txBox="1"/>
+              <p:nvPr/>
+            </p:nvSpPr>
+            <p:spPr>
+              <a:xfrm rot="16200000">
+                <a:off x="189976" y="1020366"/>
+                <a:ext cx="667798" cy="226219"/>
+              </a:xfrm>
+              <a:prstGeom prst="rect">
+                <a:avLst/>
+              </a:prstGeom>
+              <a:noFill/>
+              <a:effectLst/>
+            </p:spPr>
+            <p:txBody>
+              <a:bodyPr wrap="none" anchor="ctr" lIns="0" rIns="0" tIns="0" bIns="0">
+                <a:spAutoFit/>
+              </a:bodyPr>
+              <a:lstStyle/>
+              <a:p>
+                <a:pPr algn="ctr"/>
+                <a14:m>
+                  <m:oMath xmlns:m="http://schemas.openxmlformats.org/officeDocument/2006/math">
+                    <m:sSub>
+                      <m:e>
+                        <m:r>
+                          <a:rPr lang="en-US" dirty="0" sz="1425">
+                            <a:solidFill>
+                              <a:srgbClr val="000000"/>
+                            </a:solidFill>
+                            <a:latin typeface="Cambria Math"/>
+                          </a:rPr>
+                          <m:t>∇</m:t>
+                        </m:r>
+                      </m:e>
+                      <m:sub>
+                        <m:r>
+                          <a:rPr lang="en-US" dirty="0" sz="1425">
+                            <a:solidFill>
+                              <a:srgbClr val="000000"/>
+                            </a:solidFill>
+                            <a:latin typeface="Cambria Math"/>
+                          </a:rPr>
+                          <m:t>θ</m:t>
+                        </m:r>
+                      </m:sub>
+                    </m:sSub>
+                    <m:sSub>
+                      <m:e>
+                        <m:r>
+                          <a:rPr lang="en-US" dirty="0" sz="1425">
+                            <a:solidFill>
+                              <a:srgbClr val="000000"/>
+                            </a:solidFill>
+                            <a:latin typeface="Cambria Math"/>
+                          </a:rPr>
+                          <m:t>ℒ</m:t>
+                        </m:r>
+                      </m:e>
+                      <m:sub>
+                        <m:r>
+                          <a:rPr lang="en-US" dirty="0" sz="1425">
+                            <a:solidFill>
+                              <a:srgbClr val="000000"/>
+                            </a:solidFill>
+                            <a:latin typeface="Cambria Math"/>
+                          </a:rPr>
+                          <m:t>text</m:t>
+                        </m:r>
+                      </m:sub>
+                    </m:sSub>
+                  </m:oMath>
+                </a14:m>
+                <a:endParaRPr lang="en-US" dirty="0" sz="1425">
+                  <a:solidFill>
+                    <a:srgbClr val="000000"/>
+                  </a:solidFill>
+                  <a:latin typeface="Cambria Math"/>
+                </a:endParaRPr>
+              </a:p>
+            </p:txBody>
+          </p:sp>
+        </mc:Choice>
+        <mc:Fallback>
+          <p:sp>
+            <p:nvSpPr>
+              <p:cNvPr id="8" name="math:001" descr="AI_AUTOFIGURE_MATH_FALLBACK_ONLY_V1:eyJjb250ZW50X3J1bnMiOlt7ImNhbm9uaWNhbF9sYXRleCI6IlxcbmFibGFfe1xcdGhldGF9IFxcbWF0aGNhbHtMfV97dGV4dH0iLCJmb3JtdWxhX2lkIjoiRVEwMDEiLCJraW5kIjoibWF0aCIsImxhdGV4X3NoYTI1NiI6IjM0NTVkMzY5YTAwODk2ZDUxZjI1NzNlYjIzN2ZmNjlkMWNjYzMzOThhMzg3ZTQ0ZGE0NTI2MDFiYzA0Yjg5NjAiLCJtb2RlIjoiaW5saW5lIiwib21tbF9zaGEyNTYiOiI4ZjU5NjRkNDYwZGE3NWYxZGJmYTE0MWY3ZjMxNTc2NjE4OTEyM2ExMTQ0NWMzYTU5ZDc4NTQyMTI0Nzg3MDBmIiwic2VtYW50aWNfb21tbF9wcm9maWxlIjoib2ZmaWNlLW1hdGgtc2VtYW50aWMtdjIiLCJzZW1hbnRpY19vbW1sX3NoYTI1NiI6IjY3NjhkNjcxNDllNzE5NDcxZjgyMmYwN2IxZTFlMGFiZTIyOGZiYjAzOGM4MmJhYWE0YjU1OWJlMzJjMTliNTQifV0sImZvcm11bGFzIjpbeyJjYW5vbmljYWxfbGF0ZXgiOiJcXG5hYmxhX3tcXHRoZXRhfSBcXG1hdGhjYWx7TH1fe3RleHR9IiwiZm9ybXVsYV9pZCI6IkVRMDAxIiwibGF0ZXhfc2hhMjU2IjoiMzQ1NWQzNjlhMDA4OTZkNTFmMjU3M2ViMjM3ZmY2OWQxY2NjMzM5OGEzODdlNDRkYTQ1MjYwMWJjMDRiODk2MCIsIm1vZGUiOiJpbmxpbmUiLCJvbW1sX3NoYTI1NiI6IjhmNTk2NGQ0NjBkYTc1ZjFkYmZhMTQxZjdmMzE1NzY2MTg5MTIzYTExNDQ1YzNhNTlkNzg1NDIxMjQ3ODcwMGYiLCJzZW1hbnRpY19vbW1sX3Byb2ZpbGUiOiJvZmZpY2UtbWF0aC1zZW1hbnRpYy12MiIsInNlbWFudGljX29tbWxfc2hhMjU2IjoiNjc2OGQ2NzE0OWU3MTk0NzFmODIyZjA3YjFlMWUwYWJlMjI4ZmJiMDM4YzgyYmFhYTRiNTU5YmUzMmMxOWI1NCJ9XSwia2luZCI6Im5hdGl2ZV9vZmZpY2VfbWF0aCIsInBsYWNlaG9sZGVyX25hbWUiOiJtYXRoOjAwMSIsInNjaGVtYV92ZXJzaW9uIjoiMS4wIn0="/>
+              <p:cNvSpPr txBox="1"/>
+              <p:nvPr/>
+            </p:nvSpPr>
+            <p:spPr>
+              <a:xfrm rot="16200000">
+                <a:off x="189976" y="1020366"/>
+                <a:ext cx="667798" cy="226219"/>
+              </a:xfrm>
+              <a:prstGeom prst="rect">
+                <a:avLst/>
+              </a:prstGeom>
+              <a:noFill/>
+              <a:effectLst/>
+            </p:spPr>
+            <p:txBody>
+              <a:bodyPr wrap="none" anchor="ctr" lIns="0" rIns="0" tIns="0" bIns="0">
+                <a:spAutoFit/>
+              </a:bodyPr>
+              <a:lstStyle/>
+              <a:p>
+                <a:pPr algn="ctr"/>
+                <a:r>
+                  <a:rPr lang="en-US" dirty="0" sz="1425">
+                    <a:solidFill>
+                      <a:srgbClr val="000000"/>
+                    </a:solidFill>
+                  </a:rPr>
+                  <a:t>\(\nabla_{\theta} \mathcal{L}_{text}\)</a:t>
+                </a:r>
+                <a:endParaRPr lang="en-US" dirty="0" sz="1425">
+                  <a:solidFill>
+                    <a:srgbClr val="000000"/>
+                  </a:solidFill>
+                </a:endParaRPr>
+              </a:p>
+            </p:txBody>
+          </p:sp>
+        </mc:Fallback>
+      </mc:AlternateContent>
       <p:sp>
         <p:nvSpPr>
           <p:cNvPr id="9" name="Rectangle 8"/>
@@ -4482,6 +4562,10 @@
             </a:solidFill>
           </a:ln>
         </p:spPr>
+        <p:txBody>
+          <a:bodyPr/>
+          <a:p/>
+        </p:txBody>
       </p:sp>
       <p:sp>
         <p:nvSpPr>
@@ -4521,6 +4605,10 @@
             </a:solidFill>
           </a:ln>
         </p:spPr>
+        <p:txBody>
+          <a:bodyPr/>
+          <a:p/>
+        </p:txBody>
       </p:sp>
       <p:sp>
         <p:nvSpPr>
@@ -4557,6 +4645,10 @@
             </a:solidFill>
           </a:ln>
         </p:spPr>
+        <p:txBody>
+          <a:bodyPr/>
+          <a:p/>
+        </p:txBody>
       </p:sp>
       <p:sp>
         <p:nvSpPr>
@@ -4596,6 +4688,10 @@
             </a:solidFill>
           </a:ln>
         </p:spPr>
+        <p:txBody>
+          <a:bodyPr/>
+          <a:p/>
+        </p:txBody>
       </p:sp>
       <p:sp>
         <p:nvSpPr>
@@ -4632,6 +4728,10 @@
             </a:solidFill>
           </a:ln>
         </p:spPr>
+        <p:txBody>
+          <a:bodyPr/>
+          <a:p/>
+        </p:txBody>
       </p:sp>
       <p:sp>
         <p:nvSpPr>
@@ -4671,6 +4771,10 @@
             </a:solidFill>
           </a:ln>
         </p:spPr>
+        <p:txBody>
+          <a:bodyPr/>
+          <a:p/>
+        </p:txBody>
       </p:sp>
       <p:sp>
         <p:nvSpPr>
@@ -4707,6 +4811,10 @@
             </a:solidFill>
           </a:ln>
         </p:spPr>
+        <p:txBody>
+          <a:bodyPr/>
+          <a:p/>
+        </p:txBody>
       </p:sp>
       <p:sp>
         <p:nvSpPr>
@@ -4746,6 +4854,10 @@
             </a:solidFill>
           </a:ln>
         </p:spPr>
+        <p:txBody>
+          <a:bodyPr/>
+          <a:p/>
+        </p:txBody>
       </p:sp>
       <p:sp>
         <p:nvSpPr>
@@ -4782,6 +4894,10 @@
             </a:solidFill>
           </a:ln>
         </p:spPr>
+        <p:txBody>
+          <a:bodyPr/>
+          <a:p/>
+        </p:txBody>
       </p:sp>
       <p:sp>
         <p:nvSpPr>
@@ -4821,6 +4937,10 @@
             </a:solidFill>
           </a:ln>
         </p:spPr>
+        <p:txBody>
+          <a:bodyPr/>
+          <a:p/>
+        </p:txBody>
       </p:sp>
       <p:sp>
         <p:nvSpPr>
@@ -4857,6 +4977,10 @@
             </a:solidFill>
           </a:ln>
         </p:spPr>
+        <p:txBody>
+          <a:bodyPr/>
+          <a:p/>
+        </p:txBody>
       </p:sp>
       <p:sp>
         <p:nvSpPr>
@@ -4896,6 +5020,10 @@
             </a:solidFill>
           </a:ln>
         </p:spPr>
+        <p:txBody>
+          <a:bodyPr/>
+          <a:p/>
+        </p:txBody>
       </p:sp>
       <p:sp>
         <p:nvSpPr>
@@ -4932,6 +5060,10 @@
             </a:solidFill>
           </a:ln>
         </p:spPr>
+        <p:txBody>
+          <a:bodyPr/>
+          <a:p/>
+        </p:txBody>
       </p:sp>
       <p:sp>
         <p:nvSpPr>
@@ -4971,6 +5103,10 @@
             </a:solidFill>
           </a:ln>
         </p:spPr>
+        <p:txBody>
+          <a:bodyPr/>
+          <a:p/>
+        </p:txBody>
       </p:sp>
       <p:sp>
         <p:nvSpPr>
@@ -5007,6 +5143,10 @@
             </a:solidFill>
           </a:ln>
         </p:spPr>
+        <p:txBody>
+          <a:bodyPr/>
+          <a:p/>
+        </p:txBody>
       </p:sp>
       <p:sp>
         <p:nvSpPr>
@@ -5046,6 +5186,10 @@
             </a:solidFill>
           </a:ln>
         </p:spPr>
+        <p:txBody>
+          <a:bodyPr/>
+          <a:p/>
+        </p:txBody>
       </p:sp>
       <p:sp>
         <p:nvSpPr>
@@ -5238,6 +5382,10 @@
             </a:solidFill>
           </a:ln>
         </p:spPr>
+        <p:txBody>
+          <a:bodyPr/>
+          <a:p/>
+        </p:txBody>
       </p:sp>
       <p:sp>
         <p:nvSpPr>
@@ -5277,6 +5425,10 @@
             </a:solidFill>
           </a:ln>
         </p:spPr>
+        <p:txBody>
+          <a:bodyPr/>
+          <a:p/>
+        </p:txBody>
       </p:sp>
       <p:sp>
         <p:nvSpPr>
@@ -5319,6 +5471,10 @@
             </a:solidFill>
           </a:ln>
         </p:spPr>
+        <p:txBody>
+          <a:bodyPr/>
+          <a:p/>
+        </p:txBody>
       </p:sp>
       <p:sp>
         <p:nvSpPr>
@@ -5358,6 +5514,10 @@
             </a:solidFill>
           </a:ln>
         </p:spPr>
+        <p:txBody>
+          <a:bodyPr/>
+          <a:p/>
+        </p:txBody>
       </p:sp>
       <p:sp>
         <p:nvSpPr>
@@ -5394,6 +5554,10 @@
             </a:solidFill>
           </a:ln>
         </p:spPr>
+        <p:txBody>
+          <a:bodyPr/>
+          <a:p/>
+        </p:txBody>
       </p:sp>
       <p:sp>
         <p:nvSpPr>
@@ -5433,6 +5597,10 @@
             </a:solidFill>
           </a:ln>
         </p:spPr>
+        <p:txBody>
+          <a:bodyPr/>
+          <a:p/>
+        </p:txBody>
       </p:sp>
       <p:sp>
         <p:nvSpPr>
@@ -5469,6 +5637,10 @@
             </a:solidFill>
           </a:ln>
         </p:spPr>
+        <p:txBody>
+          <a:bodyPr/>
+          <a:p/>
+        </p:txBody>
       </p:sp>
       <p:sp>
         <p:nvSpPr>
@@ -5508,6 +5680,10 @@
             </a:solidFill>
           </a:ln>
         </p:spPr>
+        <p:txBody>
+          <a:bodyPr/>
+          <a:p/>
+        </p:txBody>
       </p:sp>
       <p:sp>
         <p:nvSpPr>
@@ -5797,6 +5973,10 @@
             <a:prstDash val="sysDash"/>
           </a:ln>
         </p:spPr>
+        <p:txBody>
+          <a:bodyPr/>
+          <a:p/>
+        </p:txBody>
       </p:sp>
       <p:sp>
         <p:nvSpPr>
@@ -5834,6 +6014,10 @@
             <a:prstDash val="sysDash"/>
           </a:ln>
         </p:spPr>
+        <p:txBody>
+          <a:bodyPr/>
+          <a:p/>
+        </p:txBody>
       </p:sp>
       <p:sp>
         <p:nvSpPr>
@@ -5893,6 +6077,10 @@
             </a:solidFill>
           </a:ln>
         </p:spPr>
+        <p:txBody>
+          <a:bodyPr/>
+          <a:p/>
+        </p:txBody>
       </p:sp>
       <p:sp>
         <p:nvSpPr>
@@ -6014,51 +6202,113 @@
           </a:p>
         </p:txBody>
       </p:sp>
-      <p:sp>
-        <p:nvSpPr>
-          <p:cNvPr id="76" name="TextBox 75"/>
-          <p:cNvSpPr txBox="1"/>
-          <p:nvPr/>
-        </p:nvSpPr>
-        <p:spPr>
-          <a:xfrm>
-            <a:off x="5087969" y="1018222"/>
-            <a:ext cx="234887" cy="214312"/>
-          </a:xfrm>
-          <a:prstGeom prst="rect">
-            <a:avLst/>
-          </a:prstGeom>
-          <a:noFill/>
-          <a:effectLst/>
-        </p:spPr>
-        <p:txBody>
-          <a:bodyPr wrap="none" anchor="t" lIns="0" rIns="0" tIns="0" bIns="0">
-            <a:spAutoFit/>
-          </a:bodyPr>
-          <a:lstStyle/>
-          <a:p>
-            <a:pPr algn="ctr"/>
-            <a:r>
-              <a:rPr sz="1350" i="1">
-                <a:solidFill>
-                  <a:srgbClr val="000000"/>
-                </a:solidFill>
-                <a:latin typeface="STIXGeneral"/>
-              </a:rPr>
-              <a:t>y</a:t>
-            </a:r>
-            <a:r>
-              <a:rPr sz="900" i="1" baseline="-25000">
-                <a:solidFill>
-                  <a:srgbClr val="000000"/>
-                </a:solidFill>
-                <a:latin typeface="STIXGeneral"/>
-              </a:rPr>
-              <a:t>gt</a:t>
-            </a:r>
-          </a:p>
-        </p:txBody>
-      </p:sp>
+      <mc:AlternateContent xmlns:mc="http://schemas.openxmlformats.org/markup-compatibility/2006">
+        <mc:Choice xmlns:a14="http://schemas.microsoft.com/office/drawing/2010/main" Requires="a14">
+          <p:sp>
+            <p:nvSpPr>
+              <p:cNvPr id="76" name="math:002" descr="AI_AUTOFIGURE_NATIVE_MATH_V1:eyJjb250ZW50X3J1bnMiOlt7ImNhbm9uaWNhbF9sYXRleCI6Inlfe2d0fSIsImZvcm11bGFfaWQiOiJFUTAwMiIsImtpbmQiOiJtYXRoIiwibGF0ZXhfc2hhMjU2IjoiNjUzZDhmMmEzM2VkMGNkOTYxNmQ5ZGI3MTc1YTAwMTg0MDI5Y2E5ZDU3NzVjY2E3YTE0ZjJkY2RiODMyZGVjMiIsIm1vZGUiOiJpbmxpbmUiLCJvbW1sX3NoYTI1NiI6IjcwZWMyYzkyOTAwMGIyMTE4NTViZjc1MWVjNTMwNmM2ODZkNWZlMDJhNTQxMWNkYmE5ZjE0Yzk2MjkwYjg0OWEiLCJzZW1hbnRpY19vbW1sX3Byb2ZpbGUiOiJvZmZpY2UtbWF0aC1zZW1hbnRpYy12MiIsInNlbWFudGljX29tbWxfc2hhMjU2IjoiM2M0YjBjNDU4NWUxMGQzZDhlMzY3YjQ4MzJjNTA2MzNhMWU0NThlODRjZWRiOWJjMzJhNjUxNDc1MDY4ZTcxNyJ9XSwiZm9ybXVsYXMiOlt7ImNhbm9uaWNhbF9sYXRleCI6Inlfe2d0fSIsImZvcm11bGFfaWQiOiJFUTAwMiIsImxhdGV4X3NoYTI1NiI6IjY1M2Q4ZjJhMzNlZDBjZDk2MTZkOWRiNzE3NWEwMDE4NDAyOWNhOWQ1Nzc1Y2NhN2ExNGYyZGNkYjgzMmRlYzIiLCJtb2RlIjoiaW5saW5lIiwib21tbF9zaGEyNTYiOiI3MGVjMmM5MjkwMDBiMjExODU1YmY3NTFlYzUzMDZjNjg2ZDVmZTAyYTU0MTFjZGJhOWYxNGM5NjI5MGI4NDlhIiwic2VtYW50aWNfb21tbF9wcm9maWxlIjoib2ZmaWNlLW1hdGgtc2VtYW50aWMtdjIiLCJzZW1hbnRpY19vbW1sX3NoYTI1NiI6IjNjNGIwYzQ1ODVlMTBkM2Q4ZTM2N2I0ODMyYzUwNjMzYTFlNDU4ZTg0Y2VkYjliYzMyYTY1MTQ3NTA2OGU3MTcifV0sImtpbmQiOiJuYXRpdmVfb2ZmaWNlX21hdGgiLCJwbGFjZWhvbGRlcl9uYW1lIjoibWF0aDowMDIiLCJzY2hlbWFfdmVyc2lvbiI6IjEuMCJ9"/>
+              <p:cNvSpPr txBox="1"/>
+              <p:nvPr/>
+            </p:nvSpPr>
+            <p:spPr>
+              <a:xfrm>
+                <a:off x="5087969" y="1018222"/>
+                <a:ext cx="234887" cy="214312"/>
+              </a:xfrm>
+              <a:prstGeom prst="rect">
+                <a:avLst/>
+              </a:prstGeom>
+              <a:noFill/>
+              <a:effectLst/>
+            </p:spPr>
+            <p:txBody>
+              <a:bodyPr wrap="none" anchor="t" lIns="0" rIns="0" tIns="0" bIns="0">
+                <a:spAutoFit/>
+              </a:bodyPr>
+              <a:lstStyle/>
+              <a:p>
+                <a:pPr algn="ctr"/>
+                <a14:m>
+                  <m:oMath xmlns:m="http://schemas.openxmlformats.org/officeDocument/2006/math">
+                    <m:sSub>
+                      <m:e>
+                        <m:r>
+                          <a:rPr lang="en-US" dirty="0" sz="1350">
+                            <a:solidFill>
+                              <a:srgbClr val="000000"/>
+                            </a:solidFill>
+                            <a:latin typeface="Cambria Math"/>
+                          </a:rPr>
+                          <m:t>y</m:t>
+                        </m:r>
+                      </m:e>
+                      <m:sub>
+                        <m:r>
+                          <a:rPr lang="en-US" dirty="0" sz="1350">
+                            <a:solidFill>
+                              <a:srgbClr val="000000"/>
+                            </a:solidFill>
+                            <a:latin typeface="Cambria Math"/>
+                          </a:rPr>
+                          <m:t>gt</m:t>
+                        </m:r>
+                      </m:sub>
+                    </m:sSub>
+                  </m:oMath>
+                </a14:m>
+                <a:endParaRPr lang="en-US" dirty="0" sz="1350">
+                  <a:solidFill>
+                    <a:srgbClr val="000000"/>
+                  </a:solidFill>
+                  <a:latin typeface="Cambria Math"/>
+                </a:endParaRPr>
+              </a:p>
+            </p:txBody>
+          </p:sp>
+        </mc:Choice>
+        <mc:Fallback>
+          <p:sp>
+            <p:nvSpPr>
+              <p:cNvPr id="76" name="math:002" descr="AI_AUTOFIGURE_MATH_FALLBACK_ONLY_V1:eyJjb250ZW50X3J1bnMiOlt7ImNhbm9uaWNhbF9sYXRleCI6Inlfe2d0fSIsImZvcm11bGFfaWQiOiJFUTAwMiIsImtpbmQiOiJtYXRoIiwibGF0ZXhfc2hhMjU2IjoiNjUzZDhmMmEzM2VkMGNkOTYxNmQ5ZGI3MTc1YTAwMTg0MDI5Y2E5ZDU3NzVjY2E3YTE0ZjJkY2RiODMyZGVjMiIsIm1vZGUiOiJpbmxpbmUiLCJvbW1sX3NoYTI1NiI6IjcwZWMyYzkyOTAwMGIyMTE4NTViZjc1MWVjNTMwNmM2ODZkNWZlMDJhNTQxMWNkYmE5ZjE0Yzk2MjkwYjg0OWEiLCJzZW1hbnRpY19vbW1sX3Byb2ZpbGUiOiJvZmZpY2UtbWF0aC1zZW1hbnRpYy12MiIsInNlbWFudGljX29tbWxfc2hhMjU2IjoiM2M0YjBjNDU4NWUxMGQzZDhlMzY3YjQ4MzJjNTA2MzNhMWU0NThlODRjZWRiOWJjMzJhNjUxNDc1MDY4ZTcxNyJ9XSwiZm9ybXVsYXMiOlt7ImNhbm9uaWNhbF9sYXRleCI6Inlfe2d0fSIsImZvcm11bGFfaWQiOiJFUTAwMiIsImxhdGV4X3NoYTI1NiI6IjY1M2Q4ZjJhMzNlZDBjZDk2MTZkOWRiNzE3NWEwMDE4NDAyOWNhOWQ1Nzc1Y2NhN2ExNGYyZGNkYjgzMmRlYzIiLCJtb2RlIjoiaW5saW5lIiwib21tbF9zaGEyNTYiOiI3MGVjMmM5MjkwMDBiMjExODU1YmY3NTFlYzUzMDZjNjg2ZDVmZTAyYTU0MTFjZGJhOWYxNGM5NjI5MGI4NDlhIiwic2VtYW50aWNfb21tbF9wcm9maWxlIjoib2ZmaWNlLW1hdGgtc2VtYW50aWMtdjIiLCJzZW1hbnRpY19vbW1sX3NoYTI1NiI6IjNjNGIwYzQ1ODVlMTBkM2Q4ZTM2N2I0ODMyYzUwNjMzYTFlNDU4ZTg0Y2VkYjliYzMyYTY1MTQ3NTA2OGU3MTcifV0sImtpbmQiOiJuYXRpdmVfb2ZmaWNlX21hdGgiLCJwbGFjZWhvbGRlcl9uYW1lIjoibWF0aDowMDIiLCJzY2hlbWFfdmVyc2lvbiI6IjEuMCJ9"/>
+              <p:cNvSpPr txBox="1"/>
+              <p:nvPr/>
+            </p:nvSpPr>
+            <p:spPr>
+              <a:xfrm>
+                <a:off x="5087969" y="1018222"/>
+                <a:ext cx="234887" cy="214312"/>
+              </a:xfrm>
+              <a:prstGeom prst="rect">
+                <a:avLst/>
+              </a:prstGeom>
+              <a:noFill/>
+              <a:effectLst/>
+            </p:spPr>
+            <p:txBody>
+              <a:bodyPr wrap="none" anchor="t" lIns="0" rIns="0" tIns="0" bIns="0">
+                <a:spAutoFit/>
+              </a:bodyPr>
+              <a:lstStyle/>
+              <a:p>
+                <a:pPr algn="ctr"/>
+                <a:r>
+                  <a:rPr lang="en-US" dirty="0" sz="1350">
+                    <a:solidFill>
+                      <a:srgbClr val="000000"/>
+                    </a:solidFill>
+                  </a:rPr>
+                  <a:t>\(y_{gt}\)</a:t>
+                </a:r>
+                <a:endParaRPr lang="en-US" dirty="0" sz="1350">
+                  <a:solidFill>
+                    <a:srgbClr val="000000"/>
+                  </a:solidFill>
+                </a:endParaRPr>
+              </a:p>
+            </p:txBody>
+          </p:sp>
+        </mc:Fallback>
+      </mc:AlternateContent>
       <p:sp>
         <p:nvSpPr>
           <p:cNvPr id="77" name="freeform-77"/>
@@ -6094,6 +6344,10 @@
             </a:solidFill>
           </a:ln>
         </p:spPr>
+        <p:txBody>
+          <a:bodyPr/>
+          <a:p/>
+        </p:txBody>
       </p:sp>
       <p:sp>
         <p:nvSpPr>
@@ -6133,6 +6387,10 @@
             </a:solidFill>
           </a:ln>
         </p:spPr>
+        <p:txBody>
+          <a:bodyPr/>
+          <a:p/>
+        </p:txBody>
       </p:sp>
       <p:sp>
         <p:nvSpPr>
@@ -6248,6 +6506,10 @@
             </a:solidFill>
           </a:ln>
         </p:spPr>
+        <p:txBody>
+          <a:bodyPr/>
+          <a:p/>
+        </p:txBody>
       </p:sp>
       <p:sp>
         <p:nvSpPr>
@@ -6287,6 +6549,10 @@
             </a:solidFill>
           </a:ln>
         </p:spPr>
+        <p:txBody>
+          <a:bodyPr/>
+          <a:p/>
+        </p:txBody>
       </p:sp>
       <p:sp>
         <p:nvSpPr>
@@ -6324,60 +6590,131 @@
           </a:p>
         </p:txBody>
       </p:sp>
-      <p:sp>
-        <p:nvSpPr>
-          <p:cNvPr id="84" name="TextBox 83"/>
-          <p:cNvSpPr txBox="1"/>
-          <p:nvPr/>
-        </p:nvSpPr>
-        <p:spPr>
-          <a:xfrm>
-            <a:off x="7696295" y="1923098"/>
-            <a:ext cx="704660" cy="214312"/>
-          </a:xfrm>
-          <a:prstGeom prst="rect">
-            <a:avLst/>
-          </a:prstGeom>
-          <a:noFill/>
-          <a:effectLst/>
-        </p:spPr>
-        <p:txBody>
-          <a:bodyPr wrap="none" anchor="t" lIns="0" rIns="0" tIns="0" bIns="0">
-            <a:spAutoFit/>
-          </a:bodyPr>
-          <a:lstStyle/>
-          <a:p>
-            <a:pPr algn="ctr"/>
-            <a:r>
-              <a:rPr sz="1350" i="1">
-                <a:solidFill>
-                  <a:srgbClr val="000000"/>
-                </a:solidFill>
-                <a:latin typeface="STIXGeneral"/>
-              </a:rPr>
-              <a:t>Î = 𝔼</a:t>
-            </a:r>
-            <a:r>
-              <a:rPr sz="900" i="1" baseline="-25000">
-                <a:solidFill>
-                  <a:srgbClr val="000000"/>
-                </a:solidFill>
-                <a:latin typeface="STIXGeneral"/>
-              </a:rPr>
-              <a:t>θ</a:t>
-            </a:r>
-            <a:r>
-              <a:rPr sz="1350" i="1">
-                <a:solidFill>
-                  <a:srgbClr val="000000"/>
-                </a:solidFill>
-                <a:latin typeface="STIXGeneral"/>
-              </a:rPr>
-              <a:t>(I)</a:t>
-            </a:r>
-          </a:p>
-        </p:txBody>
-      </p:sp>
+      <mc:AlternateContent xmlns:mc="http://schemas.openxmlformats.org/markup-compatibility/2006">
+        <mc:Choice xmlns:a14="http://schemas.microsoft.com/office/drawing/2010/main" Requires="a14">
+          <p:sp>
+            <p:nvSpPr>
+              <p:cNvPr id="84" name="math:003" descr="AI_AUTOFIGURE_NATIVE_MATH_V1:eyJjb250ZW50X3J1bnMiOlt7ImNhbm9uaWNhbF9sYXRleCI6IknMgiA9IFxcbWF0aGJie0V9X3tcXHRoZXRhfShJKSIsImZvcm11bGFfaWQiOiJFUTAwMyIsImtpbmQiOiJtYXRoIiwibGF0ZXhfc2hhMjU2IjoiYzBkMzQ1ZGI5ZTFjZWY1NTg0NTU3YjUzMzZlMzFhNmU3YmQyOWQ1NzJmMjMwMjJlYjJhZTJhOWQ3Y2VkNjhkZCIsIm1vZGUiOiJpbmxpbmUiLCJvbW1sX3NoYTI1NiI6ImE2OWY0MTM1YzUxOTExNTIyMzIzMjYwMzEyYTVlMTc5OTEzMjczZTAzZTEwNWFiY2Y4MDFiMzk5ZjcyODk3YWQiLCJzZW1hbnRpY19vbW1sX3Byb2ZpbGUiOiJvZmZpY2UtbWF0aC1zZW1hbnRpYy12MiIsInNlbWFudGljX29tbWxfc2hhMjU2IjoiMDg4OTczOWQyZGEwMDgyMzc4NDVkZjA4ODBjNTg5YzllZTM0ZDYyMjYyYzhhYTNjZTgyODZiODgyMjMyOTliZSJ9XSwiZm9ybXVsYXMiOlt7ImNhbm9uaWNhbF9sYXRleCI6IknMgiA9IFxcbWF0aGJie0V9X3tcXHRoZXRhfShJKSIsImZvcm11bGFfaWQiOiJFUTAwMyIsImxhdGV4X3NoYTI1NiI6ImMwZDM0NWRiOWUxY2VmNTU4NDU1N2I1MzM2ZTMxYTZlN2JkMjlkNTcyZjIzMDIyZWIyYWUyYTlkN2NlZDY4ZGQiLCJtb2RlIjoiaW5saW5lIiwib21tbF9zaGEyNTYiOiJhNjlmNDEzNWM1MTkxMTUyMjMyMzI2MDMxMmE1ZTE3OTkxMzI3M2UwM2UxMDVhYmNmODAxYjM5OWY3Mjg5N2FkIiwic2VtYW50aWNfb21tbF9wcm9maWxlIjoib2ZmaWNlLW1hdGgtc2VtYW50aWMtdjIiLCJzZW1hbnRpY19vbW1sX3NoYTI1NiI6IjA4ODk3MzlkMmRhMDA4MjM3ODQ1ZGYwODgwYzU4OWM5ZWUzNGQ2MjI2MmM4YWEzY2U4Mjg2Yjg4MjIzMjk5YmUifV0sImtpbmQiOiJuYXRpdmVfb2ZmaWNlX21hdGgiLCJwbGFjZWhvbGRlcl9uYW1lIjoibWF0aDowMDMiLCJzY2hlbWFfdmVyc2lvbiI6IjEuMCJ9"/>
+              <p:cNvSpPr txBox="1"/>
+              <p:nvPr/>
+            </p:nvSpPr>
+            <p:spPr>
+              <a:xfrm>
+                <a:off x="7696295" y="1923098"/>
+                <a:ext cx="704660" cy="214312"/>
+              </a:xfrm>
+              <a:prstGeom prst="rect">
+                <a:avLst/>
+              </a:prstGeom>
+              <a:noFill/>
+              <a:effectLst/>
+            </p:spPr>
+            <p:txBody>
+              <a:bodyPr wrap="none" anchor="t" lIns="0" rIns="0" tIns="0" bIns="0">
+                <a:spAutoFit/>
+              </a:bodyPr>
+              <a:lstStyle/>
+              <a:p>
+                <a:pPr algn="ctr"/>
+                <a14:m>
+                  <m:oMath xmlns:m="http://schemas.openxmlformats.org/officeDocument/2006/math">
+                    <m:r>
+                      <a:rPr lang="en-US" dirty="0" sz="1350">
+                        <a:solidFill>
+                          <a:srgbClr val="000000"/>
+                        </a:solidFill>
+                        <a:latin typeface="Cambria Math"/>
+                      </a:rPr>
+                      <m:t>Î=</m:t>
+                    </m:r>
+                    <m:sSub>
+                      <m:e>
+                        <m:r>
+                          <a:rPr lang="en-US" dirty="0" sz="1350">
+                            <a:solidFill>
+                              <a:srgbClr val="000000"/>
+                            </a:solidFill>
+                            <a:latin typeface="Cambria Math"/>
+                          </a:rPr>
+                          <m:t>𝔼</m:t>
+                        </m:r>
+                      </m:e>
+                      <m:sub>
+                        <m:r>
+                          <a:rPr lang="en-US" dirty="0" sz="1350">
+                            <a:solidFill>
+                              <a:srgbClr val="000000"/>
+                            </a:solidFill>
+                            <a:latin typeface="Cambria Math"/>
+                          </a:rPr>
+                          <m:t>θ</m:t>
+                        </m:r>
+                      </m:sub>
+                    </m:sSub>
+                    <m:r>
+                      <a:rPr lang="en-US" dirty="0" sz="1350">
+                        <a:solidFill>
+                          <a:srgbClr val="000000"/>
+                        </a:solidFill>
+                        <a:latin typeface="Cambria Math"/>
+                      </a:rPr>
+                      <m:t>(I)</m:t>
+                    </m:r>
+                  </m:oMath>
+                </a14:m>
+                <a:endParaRPr lang="en-US" dirty="0" sz="1350">
+                  <a:solidFill>
+                    <a:srgbClr val="000000"/>
+                  </a:solidFill>
+                  <a:latin typeface="Cambria Math"/>
+                </a:endParaRPr>
+              </a:p>
+            </p:txBody>
+          </p:sp>
+        </mc:Choice>
+        <mc:Fallback>
+          <p:sp>
+            <p:nvSpPr>
+              <p:cNvPr id="84" name="math:003" descr="AI_AUTOFIGURE_MATH_FALLBACK_ONLY_V1:eyJjb250ZW50X3J1bnMiOlt7ImNhbm9uaWNhbF9sYXRleCI6IknMgiA9IFxcbWF0aGJie0V9X3tcXHRoZXRhfShJKSIsImZvcm11bGFfaWQiOiJFUTAwMyIsImtpbmQiOiJtYXRoIiwibGF0ZXhfc2hhMjU2IjoiYzBkMzQ1ZGI5ZTFjZWY1NTg0NTU3YjUzMzZlMzFhNmU3YmQyOWQ1NzJmMjMwMjJlYjJhZTJhOWQ3Y2VkNjhkZCIsIm1vZGUiOiJpbmxpbmUiLCJvbW1sX3NoYTI1NiI6ImE2OWY0MTM1YzUxOTExNTIyMzIzMjYwMzEyYTVlMTc5OTEzMjczZTAzZTEwNWFiY2Y4MDFiMzk5ZjcyODk3YWQiLCJzZW1hbnRpY19vbW1sX3Byb2ZpbGUiOiJvZmZpY2UtbWF0aC1zZW1hbnRpYy12MiIsInNlbWFudGljX29tbWxfc2hhMjU2IjoiMDg4OTczOWQyZGEwMDgyMzc4NDVkZjA4ODBjNTg5YzllZTM0ZDYyMjYyYzhhYTNjZTgyODZiODgyMjMyOTliZSJ9XSwiZm9ybXVsYXMiOlt7ImNhbm9uaWNhbF9sYXRleCI6IknMgiA9IFxcbWF0aGJie0V9X3tcXHRoZXRhfShJKSIsImZvcm11bGFfaWQiOiJFUTAwMyIsImxhdGV4X3NoYTI1NiI6ImMwZDM0NWRiOWUxY2VmNTU4NDU1N2I1MzM2ZTMxYTZlN2JkMjlkNTcyZjIzMDIyZWIyYWUyYTlkN2NlZDY4ZGQiLCJtb2RlIjoiaW5saW5lIiwib21tbF9zaGEyNTYiOiJhNjlmNDEzNWM1MTkxMTUyMjMyMzI2MDMxMmE1ZTE3OTkxMzI3M2UwM2UxMDVhYmNmODAxYjM5OWY3Mjg5N2FkIiwic2VtYW50aWNfb21tbF9wcm9maWxlIjoib2ZmaWNlLW1hdGgtc2VtYW50aWMtdjIiLCJzZW1hbnRpY19vbW1sX3NoYTI1NiI6IjA4ODk3MzlkMmRhMDA4MjM3ODQ1ZGYwODgwYzU4OWM5ZWUzNGQ2MjI2MmM4YWEzY2U4Mjg2Yjg4MjIzMjk5YmUifV0sImtpbmQiOiJuYXRpdmVfb2ZmaWNlX21hdGgiLCJwbGFjZWhvbGRlcl9uYW1lIjoibWF0aDowMDMiLCJzY2hlbWFfdmVyc2lvbiI6IjEuMCJ9"/>
+              <p:cNvSpPr txBox="1"/>
+              <p:nvPr/>
+            </p:nvSpPr>
+            <p:spPr>
+              <a:xfrm>
+                <a:off x="7696295" y="1923098"/>
+                <a:ext cx="704660" cy="214312"/>
+              </a:xfrm>
+              <a:prstGeom prst="rect">
+                <a:avLst/>
+              </a:prstGeom>
+              <a:noFill/>
+              <a:effectLst/>
+            </p:spPr>
+            <p:txBody>
+              <a:bodyPr wrap="none" anchor="t" lIns="0" rIns="0" tIns="0" bIns="0">
+                <a:spAutoFit/>
+              </a:bodyPr>
+              <a:lstStyle/>
+              <a:p>
+                <a:pPr algn="ctr"/>
+                <a:r>
+                  <a:rPr lang="en-US" dirty="0" sz="1350">
+                    <a:solidFill>
+                      <a:srgbClr val="000000"/>
+                    </a:solidFill>
+                  </a:rPr>
+                  <a:t>\(Î = \mathbb{E}_{\theta}(I)\)</a:t>
+                </a:r>
+                <a:endParaRPr lang="en-US" dirty="0" sz="1350">
+                  <a:solidFill>
+                    <a:srgbClr val="000000"/>
+                  </a:solidFill>
+                </a:endParaRPr>
+              </a:p>
+            </p:txBody>
+          </p:sp>
+        </mc:Fallback>
+      </mc:AlternateContent>
       <p:pic>
         <p:nvPicPr>
           <p:cNvPr id="85" name="Picture 84" descr="image.png"/>
@@ -6437,6 +6774,10 @@
             </a:solidFill>
           </a:ln>
         </p:spPr>
+        <p:txBody>
+          <a:bodyPr/>
+          <a:p/>
+        </p:txBody>
       </p:sp>
       <p:sp>
         <p:nvSpPr>
@@ -6476,6 +6817,10 @@
             </a:solidFill>
           </a:ln>
         </p:spPr>
+        <p:txBody>
+          <a:bodyPr/>
+          <a:p/>
+        </p:txBody>
       </p:sp>
       <p:sp>
         <p:nvSpPr>
@@ -6512,6 +6857,10 @@
             </a:solidFill>
           </a:ln>
         </p:spPr>
+        <p:txBody>
+          <a:bodyPr/>
+          <a:p/>
+        </p:txBody>
       </p:sp>
       <p:sp>
         <p:nvSpPr>
@@ -6551,6 +6900,10 @@
             </a:solidFill>
           </a:ln>
         </p:spPr>
+        <p:txBody>
+          <a:bodyPr/>
+          <a:p/>
+        </p:txBody>
       </p:sp>
       <p:sp>
         <p:nvSpPr>
@@ -6669,6 +7022,10 @@
             </a:solidFill>
           </a:ln>
         </p:spPr>
+        <p:txBody>
+          <a:bodyPr/>
+          <a:p/>
+        </p:txBody>
       </p:sp>
       <p:sp>
         <p:nvSpPr>
@@ -6708,52 +7065,118 @@
             </a:solidFill>
           </a:ln>
         </p:spPr>
-      </p:sp>
-      <p:sp>
-        <p:nvSpPr>
-          <p:cNvPr id="94" name="TextBox 93"/>
-          <p:cNvSpPr txBox="1"/>
-          <p:nvPr/>
-        </p:nvSpPr>
-        <p:spPr>
-          <a:xfrm rot="16200000">
-            <a:off x="6208395" y="3633788"/>
-            <a:ext cx="441960" cy="238125"/>
-          </a:xfrm>
-          <a:prstGeom prst="rect">
-            <a:avLst/>
-          </a:prstGeom>
-          <a:noFill/>
-          <a:effectLst/>
-        </p:spPr>
-        <p:txBody>
-          <a:bodyPr wrap="none" anchor="ctr" lIns="0" rIns="0" tIns="0" bIns="0">
-            <a:spAutoFit/>
-          </a:bodyPr>
-          <a:lstStyle/>
-          <a:p>
-            <a:pPr algn="ctr"/>
-            <a:r>
-              <a:rPr sz="1500" i="1">
-                <a:solidFill>
-                  <a:srgbClr val="000000"/>
-                </a:solidFill>
-                <a:latin typeface="STIXGeneral"/>
-              </a:rPr>
-              <a:t>ℒ</a:t>
-            </a:r>
-            <a:r>
-              <a:rPr sz="975" i="1" baseline="-25000">
-                <a:solidFill>
-                  <a:srgbClr val="000000"/>
-                </a:solidFill>
-                <a:latin typeface="STIXGeneral"/>
-              </a:rPr>
-              <a:t>img</a:t>
-            </a:r>
-          </a:p>
-        </p:txBody>
-      </p:sp>
+        <p:txBody>
+          <a:bodyPr/>
+          <a:p/>
+        </p:txBody>
+      </p:sp>
+      <mc:AlternateContent xmlns:mc="http://schemas.openxmlformats.org/markup-compatibility/2006">
+        <mc:Choice xmlns:a14="http://schemas.microsoft.com/office/drawing/2010/main" Requires="a14">
+          <p:sp>
+            <p:nvSpPr>
+              <p:cNvPr id="94" name="math:004" descr="AI_AUTOFIGURE_NATIVE_MATH_V1:eyJjb250ZW50X3J1bnMiOlt7ImNhbm9uaWNhbF9sYXRleCI6IlxcbWF0aGNhbHtMfV97aW1nfSIsImZvcm11bGFfaWQiOiJFUTAwNCIsImtpbmQiOiJtYXRoIiwibGF0ZXhfc2hhMjU2IjoiODk5ZTFhMDRjM2VjNjA4NzEyODRkZTFjMzZlZTM4OWE0NGQ4YmY2NDQyMzcwNDdhMzc4YzYwYTg5MWJiMTk1MyIsIm1vZGUiOiJpbmxpbmUiLCJvbW1sX3NoYTI1NiI6IjUxMTk3OGJmYWUzYWE4NzAxYjM5MTZhN2ExODE0MWJlZjFmMmFmYWEyYTFhMGE2NmY0MzlkMWYzZWQ3MjgyY2YiLCJzZW1hbnRpY19vbW1sX3Byb2ZpbGUiOiJvZmZpY2UtbWF0aC1zZW1hbnRpYy12MiIsInNlbWFudGljX29tbWxfc2hhMjU2IjoiZDMwNmRlY2JiOTZhMDA2MGFjYmY0YWJiMDE1ZDU4YzIxOGMyMzA5MDU1MzFlOTVmNTUxMTkxNmU3ZGE2NGRjMSJ9XSwiZm9ybXVsYXMiOlt7ImNhbm9uaWNhbF9sYXRleCI6IlxcbWF0aGNhbHtMfV97aW1nfSIsImZvcm11bGFfaWQiOiJFUTAwNCIsImxhdGV4X3NoYTI1NiI6Ijg5OWUxYTA0YzNlYzYwODcxMjg0ZGUxYzM2ZWUzODlhNDRkOGJmNjQ0MjM3MDQ3YTM3OGM2MGE4OTFiYjE5NTMiLCJtb2RlIjoiaW5saW5lIiwib21tbF9zaGEyNTYiOiI1MTE5NzhiZmFlM2FhODcwMWIzOTE2YTdhMTgxNDFiZWYxZjJhZmFhMmExYTBhNjZmNDM5ZDFmM2VkNzI4MmNmIiwic2VtYW50aWNfb21tbF9wcm9maWxlIjoib2ZmaWNlLW1hdGgtc2VtYW50aWMtdjIiLCJzZW1hbnRpY19vbW1sX3NoYTI1NiI6ImQzMDZkZWNiYjk2YTAwNjBhY2JmNGFiYjAxNWQ1OGMyMThjMjMwOTA1NTMxZTk1ZjU1MTE5MTZlN2RhNjRkYzEifV0sImtpbmQiOiJuYXRpdmVfb2ZmaWNlX21hdGgiLCJwbGFjZWhvbGRlcl9uYW1lIjoibWF0aDowMDQiLCJzY2hlbWFfdmVyc2lvbiI6IjEuMCJ9"/>
+              <p:cNvSpPr txBox="1"/>
+              <p:nvPr/>
+            </p:nvSpPr>
+            <p:spPr>
+              <a:xfrm rot="16200000">
+                <a:off x="6208395" y="3633788"/>
+                <a:ext cx="441960" cy="238125"/>
+              </a:xfrm>
+              <a:prstGeom prst="rect">
+                <a:avLst/>
+              </a:prstGeom>
+              <a:noFill/>
+              <a:effectLst/>
+            </p:spPr>
+            <p:txBody>
+              <a:bodyPr wrap="none" anchor="ctr" lIns="0" rIns="0" tIns="0" bIns="0">
+                <a:spAutoFit/>
+              </a:bodyPr>
+              <a:lstStyle/>
+              <a:p>
+                <a:pPr algn="ctr"/>
+                <a14:m>
+                  <m:oMath xmlns:m="http://schemas.openxmlformats.org/officeDocument/2006/math">
+                    <m:sSub>
+                      <m:e>
+                        <m:r>
+                          <a:rPr lang="en-US" dirty="0" sz="1500">
+                            <a:solidFill>
+                              <a:srgbClr val="000000"/>
+                            </a:solidFill>
+                            <a:latin typeface="Cambria Math"/>
+                          </a:rPr>
+                          <m:t>ℒ</m:t>
+                        </m:r>
+                      </m:e>
+                      <m:sub>
+                        <m:r>
+                          <a:rPr lang="en-US" dirty="0" sz="1500">
+                            <a:solidFill>
+                              <a:srgbClr val="000000"/>
+                            </a:solidFill>
+                            <a:latin typeface="Cambria Math"/>
+                          </a:rPr>
+                          <m:t>img</m:t>
+                        </m:r>
+                      </m:sub>
+                    </m:sSub>
+                  </m:oMath>
+                </a14:m>
+                <a:endParaRPr lang="en-US" dirty="0" sz="1500">
+                  <a:solidFill>
+                    <a:srgbClr val="000000"/>
+                  </a:solidFill>
+                  <a:latin typeface="Cambria Math"/>
+                </a:endParaRPr>
+              </a:p>
+            </p:txBody>
+          </p:sp>
+        </mc:Choice>
+        <mc:Fallback>
+          <p:sp>
+            <p:nvSpPr>
+              <p:cNvPr id="94" name="math:004" descr="AI_AUTOFIGURE_MATH_FALLBACK_ONLY_V1:eyJjb250ZW50X3J1bnMiOlt7ImNhbm9uaWNhbF9sYXRleCI6IlxcbWF0aGNhbHtMfV97aW1nfSIsImZvcm11bGFfaWQiOiJFUTAwNCIsImtpbmQiOiJtYXRoIiwibGF0ZXhfc2hhMjU2IjoiODk5ZTFhMDRjM2VjNjA4NzEyODRkZTFjMzZlZTM4OWE0NGQ4YmY2NDQyMzcwNDdhMzc4YzYwYTg5MWJiMTk1MyIsIm1vZGUiOiJpbmxpbmUiLCJvbW1sX3NoYTI1NiI6IjUxMTk3OGJmYWUzYWE4NzAxYjM5MTZhN2ExODE0MWJlZjFmMmFmYWEyYTFhMGE2NmY0MzlkMWYzZWQ3MjgyY2YiLCJzZW1hbnRpY19vbW1sX3Byb2ZpbGUiOiJvZmZpY2UtbWF0aC1zZW1hbnRpYy12MiIsInNlbWFudGljX29tbWxfc2hhMjU2IjoiZDMwNmRlY2JiOTZhMDA2MGFjYmY0YWJiMDE1ZDU4YzIxOGMyMzA5MDU1MzFlOTVmNTUxMTkxNmU3ZGE2NGRjMSJ9XSwiZm9ybXVsYXMiOlt7ImNhbm9uaWNhbF9sYXRleCI6IlxcbWF0aGNhbHtMfV97aW1nfSIsImZvcm11bGFfaWQiOiJFUTAwNCIsImxhdGV4X3NoYTI1NiI6Ijg5OWUxYTA0YzNlYzYwODcxMjg0ZGUxYzM2ZWUzODlhNDRkOGJmNjQ0MjM3MDQ3YTM3OGM2MGE4OTFiYjE5NTMiLCJtb2RlIjoiaW5saW5lIiwib21tbF9zaGEyNTYiOiI1MTE5NzhiZmFlM2FhODcwMWIzOTE2YTdhMTgxNDFiZWYxZjJhZmFhMmExYTBhNjZmNDM5ZDFmM2VkNzI4MmNmIiwic2VtYW50aWNfb21tbF9wcm9maWxlIjoib2ZmaWNlLW1hdGgtc2VtYW50aWMtdjIiLCJzZW1hbnRpY19vbW1sX3NoYTI1NiI6ImQzMDZkZWNiYjk2YTAwNjBhY2JmNGFiYjAxNWQ1OGMyMThjMjMwOTA1NTMxZTk1ZjU1MTE5MTZlN2RhNjRkYzEifV0sImtpbmQiOiJuYXRpdmVfb2ZmaWNlX21hdGgiLCJwbGFjZWhvbGRlcl9uYW1lIjoibWF0aDowMDQiLCJzY2hlbWFfdmVyc2lvbiI6IjEuMCJ9"/>
+              <p:cNvSpPr txBox="1"/>
+              <p:nvPr/>
+            </p:nvSpPr>
+            <p:spPr>
+              <a:xfrm rot="16200000">
+                <a:off x="6208395" y="3633788"/>
+                <a:ext cx="441960" cy="238125"/>
+              </a:xfrm>
+              <a:prstGeom prst="rect">
+                <a:avLst/>
+              </a:prstGeom>
+              <a:noFill/>
+              <a:effectLst/>
+            </p:spPr>
+            <p:txBody>
+              <a:bodyPr wrap="none" anchor="ctr" lIns="0" rIns="0" tIns="0" bIns="0">
+                <a:spAutoFit/>
+              </a:bodyPr>
+              <a:lstStyle/>
+              <a:p>
+                <a:pPr algn="ctr"/>
+                <a:r>
+                  <a:rPr lang="en-US" dirty="0" sz="1500">
+                    <a:solidFill>
+                      <a:srgbClr val="000000"/>
+                    </a:solidFill>
+                  </a:rPr>
+                  <a:t>\(\mathcal{L}_{img}\)</a:t>
+                </a:r>
+                <a:endParaRPr lang="en-US" dirty="0" sz="1500">
+                  <a:solidFill>
+                    <a:srgbClr val="000000"/>
+                  </a:solidFill>
+                </a:endParaRPr>
+              </a:p>
+            </p:txBody>
+          </p:sp>
+        </mc:Fallback>
+      </mc:AlternateContent>
       <p:pic>
         <p:nvPicPr>
           <p:cNvPr id="95" name="Picture 94" descr="image.png"/>
@@ -7699,6 +8122,10 @@
             </a:solidFill>
           </a:ln>
         </p:spPr>
+        <p:txBody>
+          <a:bodyPr/>
+          <a:p/>
+        </p:txBody>
       </p:sp>
       <p:sp>
         <p:nvSpPr>
@@ -7740,6 +8167,10 @@
             </a:solidFill>
           </a:ln>
         </p:spPr>
+        <p:txBody>
+          <a:bodyPr/>
+          <a:p/>
+        </p:txBody>
       </p:sp>
       <p:sp>
         <p:nvSpPr>
@@ -7778,6 +8209,10 @@
             </a:solidFill>
           </a:ln>
         </p:spPr>
+        <p:txBody>
+          <a:bodyPr/>
+          <a:p/>
+        </p:txBody>
       </p:sp>
       <p:sp>
         <p:nvSpPr>
@@ -7819,6 +8254,10 @@
             </a:solidFill>
           </a:ln>
         </p:spPr>
+        <p:txBody>
+          <a:bodyPr/>
+          <a:p/>
+        </p:txBody>
       </p:sp>
       <p:sp>
         <p:nvSpPr>
@@ -7857,6 +8296,10 @@
             </a:solidFill>
           </a:ln>
         </p:spPr>
+        <p:txBody>
+          <a:bodyPr/>
+          <a:p/>
+        </p:txBody>
       </p:sp>
       <p:sp>
         <p:nvSpPr>
@@ -7898,6 +8341,10 @@
             </a:solidFill>
           </a:ln>
         </p:spPr>
+        <p:txBody>
+          <a:bodyPr/>
+          <a:p/>
+        </p:txBody>
       </p:sp>
       <p:sp>
         <p:nvSpPr>
@@ -7936,6 +8383,10 @@
             </a:solidFill>
           </a:ln>
         </p:spPr>
+        <p:txBody>
+          <a:bodyPr/>
+          <a:p/>
+        </p:txBody>
       </p:sp>
       <p:sp>
         <p:nvSpPr>
@@ -7977,6 +8428,10 @@
             </a:solidFill>
           </a:ln>
         </p:spPr>
+        <p:txBody>
+          <a:bodyPr/>
+          <a:p/>
+        </p:txBody>
       </p:sp>
       <p:cxnSp>
         <p:nvCxnSpPr>
@@ -10317,6 +10772,10 @@
             </a:solidFill>
           </a:ln>
         </p:spPr>
+        <p:txBody>
+          <a:bodyPr/>
+          <a:p/>
+        </p:txBody>
       </p:sp>
       <p:sp>
         <p:nvSpPr>
@@ -10356,6 +10815,10 @@
             </a:solidFill>
           </a:ln>
         </p:spPr>
+        <p:txBody>
+          <a:bodyPr/>
+          <a:p/>
+        </p:txBody>
       </p:sp>
       <p:sp>
         <p:nvSpPr>
@@ -10477,51 +10940,113 @@
           </a:p>
         </p:txBody>
       </p:sp>
-      <p:sp>
-        <p:nvSpPr>
-          <p:cNvPr id="190" name="TextBox 189"/>
-          <p:cNvSpPr txBox="1"/>
-          <p:nvPr/>
-        </p:nvSpPr>
-        <p:spPr>
-          <a:xfrm>
-            <a:off x="10844594" y="1018222"/>
-            <a:ext cx="418338" cy="214312"/>
-          </a:xfrm>
-          <a:prstGeom prst="rect">
-            <a:avLst/>
-          </a:prstGeom>
-          <a:noFill/>
-          <a:effectLst/>
-        </p:spPr>
-        <p:txBody>
-          <a:bodyPr wrap="none" anchor="t" lIns="0" rIns="0" tIns="0" bIns="0">
-            <a:spAutoFit/>
-          </a:bodyPr>
-          <a:lstStyle/>
-          <a:p>
-            <a:pPr algn="ctr"/>
-            <a:r>
-              <a:rPr sz="1350" i="1">
-                <a:solidFill>
-                  <a:srgbClr val="000000"/>
-                </a:solidFill>
-                <a:latin typeface="STIXGeneral"/>
-              </a:rPr>
-              <a:t>y</a:t>
-            </a:r>
-            <a:r>
-              <a:rPr sz="900" i="1" baseline="-25000">
-                <a:solidFill>
-                  <a:srgbClr val="000000"/>
-                </a:solidFill>
-                <a:latin typeface="STIXGeneral"/>
-              </a:rPr>
-              <a:t>pred</a:t>
-            </a:r>
-          </a:p>
-        </p:txBody>
-      </p:sp>
+      <mc:AlternateContent xmlns:mc="http://schemas.openxmlformats.org/markup-compatibility/2006">
+        <mc:Choice xmlns:a14="http://schemas.microsoft.com/office/drawing/2010/main" Requires="a14">
+          <p:sp>
+            <p:nvSpPr>
+              <p:cNvPr id="190" name="math:005" descr="AI_AUTOFIGURE_NATIVE_MATH_V1:eyJjb250ZW50X3J1bnMiOlt7ImNhbm9uaWNhbF9sYXRleCI6Inlfe3ByZWR9IiwiZm9ybXVsYV9pZCI6IkVRMDA1Iiwia2luZCI6Im1hdGgiLCJsYXRleF9zaGEyNTYiOiIwNDI0ZWE1ZjM0YWYxMjEwZTI4MDgxOGNiMTc1OTBkZGFmMmRkODljZTQxMTU3NGVhNTU2Mzk0YzI3NTIxNjUzIiwibW9kZSI6ImlubGluZSIsIm9tbWxfc2hhMjU2IjoiOThmZmI5M2YzNTZmYTJkN2Y0MTQyYTczNjQ5Mjk3NWIwMjIxOTVlZDE2ZDMyMDg5YjgxNGRjZjU2OGRmMjliZSIsInNlbWFudGljX29tbWxfcHJvZmlsZSI6Im9mZmljZS1tYXRoLXNlbWFudGljLXYyIiwic2VtYW50aWNfb21tbF9zaGEyNTYiOiIxMTk5Yjg1ZTk1YmZmNmMwNTI5ZmNiZGJjOWNiYWY4ZDUwNjA2ZWY0YmQ4NTgxMzhmYzlkNzkwNzFmOTdmZjMyIn1dLCJmb3JtdWxhcyI6W3siY2Fub25pY2FsX2xhdGV4IjoieV97cHJlZH0iLCJmb3JtdWxhX2lkIjoiRVEwMDUiLCJsYXRleF9zaGEyNTYiOiIwNDI0ZWE1ZjM0YWYxMjEwZTI4MDgxOGNiMTc1OTBkZGFmMmRkODljZTQxMTU3NGVhNTU2Mzk0YzI3NTIxNjUzIiwibW9kZSI6ImlubGluZSIsIm9tbWxfc2hhMjU2IjoiOThmZmI5M2YzNTZmYTJkN2Y0MTQyYTczNjQ5Mjk3NWIwMjIxOTVlZDE2ZDMyMDg5YjgxNGRjZjU2OGRmMjliZSIsInNlbWFudGljX29tbWxfcHJvZmlsZSI6Im9mZmljZS1tYXRoLXNlbWFudGljLXYyIiwic2VtYW50aWNfb21tbF9zaGEyNTYiOiIxMTk5Yjg1ZTk1YmZmNmMwNTI5ZmNiZGJjOWNiYWY4ZDUwNjA2ZWY0YmQ4NTgxMzhmYzlkNzkwNzFmOTdmZjMyIn1dLCJraW5kIjoibmF0aXZlX29mZmljZV9tYXRoIiwicGxhY2Vob2xkZXJfbmFtZSI6Im1hdGg6MDA1Iiwic2NoZW1hX3ZlcnNpb24iOiIxLjAifQ=="/>
+              <p:cNvSpPr txBox="1"/>
+              <p:nvPr/>
+            </p:nvSpPr>
+            <p:spPr>
+              <a:xfrm>
+                <a:off x="10844594" y="1018222"/>
+                <a:ext cx="418338" cy="214312"/>
+              </a:xfrm>
+              <a:prstGeom prst="rect">
+                <a:avLst/>
+              </a:prstGeom>
+              <a:noFill/>
+              <a:effectLst/>
+            </p:spPr>
+            <p:txBody>
+              <a:bodyPr wrap="none" anchor="t" lIns="0" rIns="0" tIns="0" bIns="0">
+                <a:spAutoFit/>
+              </a:bodyPr>
+              <a:lstStyle/>
+              <a:p>
+                <a:pPr algn="ctr"/>
+                <a14:m>
+                  <m:oMath xmlns:m="http://schemas.openxmlformats.org/officeDocument/2006/math">
+                    <m:sSub>
+                      <m:e>
+                        <m:r>
+                          <a:rPr lang="en-US" dirty="0" sz="1350">
+                            <a:solidFill>
+                              <a:srgbClr val="000000"/>
+                            </a:solidFill>
+                            <a:latin typeface="Cambria Math"/>
+                          </a:rPr>
+                          <m:t>y</m:t>
+                        </m:r>
+                      </m:e>
+                      <m:sub>
+                        <m:r>
+                          <a:rPr lang="en-US" dirty="0" sz="1350">
+                            <a:solidFill>
+                              <a:srgbClr val="000000"/>
+                            </a:solidFill>
+                            <a:latin typeface="Cambria Math"/>
+                          </a:rPr>
+                          <m:t>pred</m:t>
+                        </m:r>
+                      </m:sub>
+                    </m:sSub>
+                  </m:oMath>
+                </a14:m>
+                <a:endParaRPr lang="en-US" dirty="0" sz="1350">
+                  <a:solidFill>
+                    <a:srgbClr val="000000"/>
+                  </a:solidFill>
+                  <a:latin typeface="Cambria Math"/>
+                </a:endParaRPr>
+              </a:p>
+            </p:txBody>
+          </p:sp>
+        </mc:Choice>
+        <mc:Fallback>
+          <p:sp>
+            <p:nvSpPr>
+              <p:cNvPr id="190" name="math:005" descr="AI_AUTOFIGURE_MATH_FALLBACK_ONLY_V1:eyJjb250ZW50X3J1bnMiOlt7ImNhbm9uaWNhbF9sYXRleCI6Inlfe3ByZWR9IiwiZm9ybXVsYV9pZCI6IkVRMDA1Iiwia2luZCI6Im1hdGgiLCJsYXRleF9zaGEyNTYiOiIwNDI0ZWE1ZjM0YWYxMjEwZTI4MDgxOGNiMTc1OTBkZGFmMmRkODljZTQxMTU3NGVhNTU2Mzk0YzI3NTIxNjUzIiwibW9kZSI6ImlubGluZSIsIm9tbWxfc2hhMjU2IjoiOThmZmI5M2YzNTZmYTJkN2Y0MTQyYTczNjQ5Mjk3NWIwMjIxOTVlZDE2ZDMyMDg5YjgxNGRjZjU2OGRmMjliZSIsInNlbWFudGljX29tbWxfcHJvZmlsZSI6Im9mZmljZS1tYXRoLXNlbWFudGljLXYyIiwic2VtYW50aWNfb21tbF9zaGEyNTYiOiIxMTk5Yjg1ZTk1YmZmNmMwNTI5ZmNiZGJjOWNiYWY4ZDUwNjA2ZWY0YmQ4NTgxMzhmYzlkNzkwNzFmOTdmZjMyIn1dLCJmb3JtdWxhcyI6W3siY2Fub25pY2FsX2xhdGV4IjoieV97cHJlZH0iLCJmb3JtdWxhX2lkIjoiRVEwMDUiLCJsYXRleF9zaGEyNTYiOiIwNDI0ZWE1ZjM0YWYxMjEwZTI4MDgxOGNiMTc1OTBkZGFmMmRkODljZTQxMTU3NGVhNTU2Mzk0YzI3NTIxNjUzIiwibW9kZSI6ImlubGluZSIsIm9tbWxfc2hhMjU2IjoiOThmZmI5M2YzNTZmYTJkN2Y0MTQyYTczNjQ5Mjk3NWIwMjIxOTVlZDE2ZDMyMDg5YjgxNGRjZjU2OGRmMjliZSIsInNlbWFudGljX29tbWxfcHJvZmlsZSI6Im9mZmljZS1tYXRoLXNlbWFudGljLXYyIiwic2VtYW50aWNfb21tbF9zaGEyNTYiOiIxMTk5Yjg1ZTk1YmZmNmMwNTI5ZmNiZGJjOWNiYWY4ZDUwNjA2ZWY0YmQ4NTgxMzhmYzlkNzkwNzFmOTdmZjMyIn1dLCJraW5kIjoibmF0aXZlX29mZmljZV9tYXRoIiwicGxhY2Vob2xkZXJfbmFtZSI6Im1hdGg6MDA1Iiwic2NoZW1hX3ZlcnNpb24iOiIxLjAifQ=="/>
+              <p:cNvSpPr txBox="1"/>
+              <p:nvPr/>
+            </p:nvSpPr>
+            <p:spPr>
+              <a:xfrm>
+                <a:off x="10844594" y="1018222"/>
+                <a:ext cx="418338" cy="214312"/>
+              </a:xfrm>
+              <a:prstGeom prst="rect">
+                <a:avLst/>
+              </a:prstGeom>
+              <a:noFill/>
+              <a:effectLst/>
+            </p:spPr>
+            <p:txBody>
+              <a:bodyPr wrap="none" anchor="t" lIns="0" rIns="0" tIns="0" bIns="0">
+                <a:spAutoFit/>
+              </a:bodyPr>
+              <a:lstStyle/>
+              <a:p>
+                <a:pPr algn="ctr"/>
+                <a:r>
+                  <a:rPr lang="en-US" dirty="0" sz="1350">
+                    <a:solidFill>
+                      <a:srgbClr val="000000"/>
+                    </a:solidFill>
+                  </a:rPr>
+                  <a:t>\(y_{pred}\)</a:t>
+                </a:r>
+                <a:endParaRPr lang="en-US" dirty="0" sz="1350">
+                  <a:solidFill>
+                    <a:srgbClr val="000000"/>
+                  </a:solidFill>
+                </a:endParaRPr>
+              </a:p>
+            </p:txBody>
+          </p:sp>
+        </mc:Fallback>
+      </mc:AlternateContent>
       <p:sp>
         <p:nvSpPr>
           <p:cNvPr id="191" name="freeform-191"/>
@@ -10557,6 +11082,10 @@
             </a:solidFill>
           </a:ln>
         </p:spPr>
+        <p:txBody>
+          <a:bodyPr/>
+          <a:p/>
+        </p:txBody>
       </p:sp>
       <p:sp>
         <p:nvSpPr>
@@ -10596,6 +11125,10 @@
             </a:solidFill>
           </a:ln>
         </p:spPr>
+        <p:txBody>
+          <a:bodyPr/>
+          <a:p/>
+        </p:txBody>
       </p:sp>
       <p:sp>
         <p:nvSpPr>
@@ -10681,96 +11214,206 @@
           </a:p>
         </p:txBody>
       </p:sp>
-      <p:sp>
-        <p:nvSpPr>
-          <p:cNvPr id="195" name="TextBox 194"/>
-          <p:cNvSpPr txBox="1"/>
-          <p:nvPr/>
-        </p:nvSpPr>
-        <p:spPr>
-          <a:xfrm>
-            <a:off x="10116693" y="4751546"/>
-            <a:ext cx="1016889" cy="202406"/>
-          </a:xfrm>
-          <a:prstGeom prst="rect">
-            <a:avLst/>
-          </a:prstGeom>
-          <a:noFill/>
-          <a:effectLst/>
-        </p:spPr>
-        <p:txBody>
-          <a:bodyPr wrap="none" anchor="t" lIns="0" rIns="0" tIns="0" bIns="0">
-            <a:spAutoFit/>
-          </a:bodyPr>
-          <a:lstStyle/>
-          <a:p>
-            <a:pPr algn="ctr"/>
-            <a:r>
-              <a:rPr sz="1275" i="1">
-                <a:solidFill>
-                  <a:srgbClr val="000000"/>
-                </a:solidFill>
-                <a:latin typeface="STIXGeneral"/>
-              </a:rPr>
-              <a:t>&lt;q</a:t>
-            </a:r>
-            <a:r>
-              <a:rPr sz="825" i="1" baseline="-25000">
-                <a:solidFill>
-                  <a:srgbClr val="000000"/>
-                </a:solidFill>
-                <a:latin typeface="STIXGeneral"/>
-              </a:rPr>
-              <a:t>1</a:t>
-            </a:r>
-            <a:r>
-              <a:rPr sz="1275" i="1">
-                <a:solidFill>
-                  <a:srgbClr val="000000"/>
-                </a:solidFill>
-                <a:latin typeface="STIXGeneral"/>
-              </a:rPr>
-              <a:t>, q</a:t>
-            </a:r>
-            <a:r>
-              <a:rPr sz="825" i="1" baseline="-25000">
-                <a:solidFill>
-                  <a:srgbClr val="000000"/>
-                </a:solidFill>
-                <a:latin typeface="STIXGeneral"/>
-              </a:rPr>
-              <a:t>2</a:t>
-            </a:r>
-            <a:r>
-              <a:rPr sz="1275" i="1">
-                <a:solidFill>
-                  <a:srgbClr val="000000"/>
-                </a:solidFill>
-                <a:latin typeface="STIXGeneral"/>
-              </a:rPr>
-              <a:t> ... q</a:t>
-            </a:r>
-            <a:r>
-              <a:rPr sz="825" i="1" baseline="-25000">
-                <a:solidFill>
-                  <a:srgbClr val="000000"/>
-                </a:solidFill>
-                <a:latin typeface="STIXGeneral"/>
-              </a:rPr>
-              <a:t>n</a:t>
-            </a:r>
-            <a:r>
-              <a:rPr sz="1275" i="1">
-                <a:solidFill>
-                  <a:srgbClr val="000000"/>
-                </a:solidFill>
-                <a:latin typeface="STIXGeneral"/>
-              </a:rPr>
-              <a:t>&gt;</a:t>
-            </a:r>
-          </a:p>
-        </p:txBody>
-      </p:sp>
+      <mc:AlternateContent xmlns:mc="http://schemas.openxmlformats.org/markup-compatibility/2006">
+        <mc:Choice xmlns:a14="http://schemas.microsoft.com/office/drawing/2010/main" Requires="a14">
+          <p:sp>
+            <p:nvSpPr>
+              <p:cNvPr id="195" name="math:006" descr="AI_AUTOFIGURE_NATIVE_MATH_V1:eyJjb250ZW50X3J1bnMiOlt7ImNhbm9uaWNhbF9sYXRleCI6IjxxX3sxfSwgcV97Mn0gLi4uIHFfe259PiIsImZvcm11bGFfaWQiOiJFUTAwNiIsImtpbmQiOiJtYXRoIiwibGF0ZXhfc2hhMjU2IjoiNzU3NDczYWYwODA2ZDEyYjY4NGQ1YzZiN2ZmYzMxMWIwYjI5ZTMzOTI0MDE2YjYyNmVlZmNkZGIyYWQ3Y2E3YyIsIm1vZGUiOiJpbmxpbmUiLCJvbW1sX3NoYTI1NiI6IjFmMjhjNDhhMDVhMzk0MWYyNGNhYjk2YWJlNDJlYTI3NDhjYzM5ZjBjYmM5NjA0ZGQwYTE5NGQyMjJmM2E4MjYiLCJzZW1hbnRpY19vbW1sX3Byb2ZpbGUiOiJvZmZpY2UtbWF0aC1zZW1hbnRpYy12MiIsInNlbWFudGljX29tbWxfc2hhMjU2IjoiYTA2MWY5OTI2ODY1YzlmOTRlMWI0Mzg5Mzc2Zjc3ODhlZGZlZDkzNTI2MzE5ZGE1OGQzZGIyM2U3NDFkYTY5ZSJ9XSwiZm9ybXVsYXMiOlt7ImNhbm9uaWNhbF9sYXRleCI6IjxxX3sxfSwgcV97Mn0gLi4uIHFfe259PiIsImZvcm11bGFfaWQiOiJFUTAwNiIsImxhdGV4X3NoYTI1NiI6Ijc1NzQ3M2FmMDgwNmQxMmI2ODRkNWM2YjdmZmMzMTFiMGIyOWUzMzkyNDAxNmI2MjZlZWZjZGRiMmFkN2NhN2MiLCJtb2RlIjoiaW5saW5lIiwib21tbF9zaGEyNTYiOiIxZjI4YzQ4YTA1YTM5NDFmMjRjYWI5NmFiZTQyZWEyNzQ4Y2MzOWYwY2JjOTYwNGRkMGExOTRkMjIyZjNhODI2Iiwic2VtYW50aWNfb21tbF9wcm9maWxlIjoib2ZmaWNlLW1hdGgtc2VtYW50aWMtdjIiLCJzZW1hbnRpY19vbW1sX3NoYTI1NiI6ImEwNjFmOTkyNjg2NWM5Zjk0ZTFiNDM4OTM3NmY3Nzg4ZWRmZWQ5MzUyNjMxOWRhNThkM2RiMjNlNzQxZGE2OWUifV0sImtpbmQiOiJuYXRpdmVfb2ZmaWNlX21hdGgiLCJwbGFjZWhvbGRlcl9uYW1lIjoibWF0aDowMDYiLCJzY2hlbWFfdmVyc2lvbiI6IjEuMCJ9"/>
+              <p:cNvSpPr txBox="1"/>
+              <p:nvPr/>
+            </p:nvSpPr>
+            <p:spPr>
+              <a:xfrm>
+                <a:off x="10116693" y="4751546"/>
+                <a:ext cx="1016889" cy="202406"/>
+              </a:xfrm>
+              <a:prstGeom prst="rect">
+                <a:avLst/>
+              </a:prstGeom>
+              <a:noFill/>
+              <a:effectLst/>
+            </p:spPr>
+            <p:txBody>
+              <a:bodyPr wrap="none" anchor="t" lIns="0" rIns="0" tIns="0" bIns="0">
+                <a:spAutoFit/>
+              </a:bodyPr>
+              <a:lstStyle/>
+              <a:p>
+                <a:pPr algn="ctr"/>
+                <a14:m>
+                  <m:oMath xmlns:m="http://schemas.openxmlformats.org/officeDocument/2006/math">
+                    <m:d>
+                      <m:dPr>
+                        <m:begChr m:val="&lt;"/>
+                        <m:sepChr m:val=""/>
+                        <m:endChr m:val="&gt;"/>
+                      </m:dPr>
+                      <m:e>
+                        <m:sSub>
+                          <m:e>
+                            <m:r>
+                              <a:rPr lang="en-US" dirty="0" sz="1275">
+                                <a:solidFill>
+                                  <a:srgbClr val="000000"/>
+                                </a:solidFill>
+                                <a:latin typeface="Cambria Math"/>
+                              </a:rPr>
+                              <m:t>q</m:t>
+                            </m:r>
+                          </m:e>
+                          <m:sub>
+                            <m:r>
+                              <a:rPr lang="en-US" dirty="0" sz="1275">
+                                <a:solidFill>
+                                  <a:srgbClr val="000000"/>
+                                </a:solidFill>
+                                <a:latin typeface="Cambria Math"/>
+                              </a:rPr>
+                              <m:t>1</m:t>
+                            </m:r>
+                          </m:sub>
+                        </m:sSub>
+                        <m:r>
+                          <a:rPr lang="en-US" dirty="0" sz="1275">
+                            <a:solidFill>
+                              <a:srgbClr val="000000"/>
+                            </a:solidFill>
+                            <a:latin typeface="Cambria Math"/>
+                          </a:rPr>
+                          <m:t>,</m:t>
+                        </m:r>
+                        <m:sSub>
+                          <m:e>
+                            <m:r>
+                              <a:rPr lang="en-US" dirty="0" sz="1275">
+                                <a:solidFill>
+                                  <a:srgbClr val="000000"/>
+                                </a:solidFill>
+                                <a:latin typeface="Cambria Math"/>
+                              </a:rPr>
+                              <m:t>q</m:t>
+                            </m:r>
+                          </m:e>
+                          <m:sub>
+                            <m:r>
+                              <a:rPr lang="en-US" dirty="0" sz="1275">
+                                <a:solidFill>
+                                  <a:srgbClr val="000000"/>
+                                </a:solidFill>
+                                <a:latin typeface="Cambria Math"/>
+                              </a:rPr>
+                              <m:t>2</m:t>
+                            </m:r>
+                          </m:sub>
+                        </m:sSub>
+                        <m:r>
+                          <a:rPr lang="en-US" dirty="0" sz="1275">
+                            <a:solidFill>
+                              <a:srgbClr val="000000"/>
+                            </a:solidFill>
+                            <a:latin typeface="Cambria Math"/>
+                          </a:rPr>
+                          <m:t>.</m:t>
+                        </m:r>
+                        <m:r>
+                          <a:rPr lang="en-US" dirty="0" sz="1275">
+                            <a:solidFill>
+                              <a:srgbClr val="000000"/>
+                            </a:solidFill>
+                            <a:latin typeface="Cambria Math"/>
+                          </a:rPr>
+                          <m:t>.</m:t>
+                        </m:r>
+                        <m:r>
+                          <a:rPr lang="en-US" dirty="0" sz="1275">
+                            <a:solidFill>
+                              <a:srgbClr val="000000"/>
+                            </a:solidFill>
+                            <a:latin typeface="Cambria Math"/>
+                          </a:rPr>
+                          <m:t>.</m:t>
+                        </m:r>
+                        <m:sSub>
+                          <m:e>
+                            <m:r>
+                              <a:rPr lang="en-US" dirty="0" sz="1275">
+                                <a:solidFill>
+                                  <a:srgbClr val="000000"/>
+                                </a:solidFill>
+                                <a:latin typeface="Cambria Math"/>
+                              </a:rPr>
+                              <m:t>q</m:t>
+                            </m:r>
+                          </m:e>
+                          <m:sub>
+                            <m:r>
+                              <a:rPr lang="en-US" dirty="0" sz="1275">
+                                <a:solidFill>
+                                  <a:srgbClr val="000000"/>
+                                </a:solidFill>
+                                <a:latin typeface="Cambria Math"/>
+                              </a:rPr>
+                              <m:t>n</m:t>
+                            </m:r>
+                          </m:sub>
+                        </m:sSub>
+                      </m:e>
+                    </m:d>
+                  </m:oMath>
+                </a14:m>
+                <a:endParaRPr lang="en-US" dirty="0" sz="1275">
+                  <a:solidFill>
+                    <a:srgbClr val="000000"/>
+                  </a:solidFill>
+                  <a:latin typeface="Cambria Math"/>
+                </a:endParaRPr>
+              </a:p>
+            </p:txBody>
+          </p:sp>
+        </mc:Choice>
+        <mc:Fallback>
+          <p:sp>
+            <p:nvSpPr>
+              <p:cNvPr id="195" name="math:006" descr="AI_AUTOFIGURE_MATH_FALLBACK_ONLY_V1:eyJjb250ZW50X3J1bnMiOlt7ImNhbm9uaWNhbF9sYXRleCI6IjxxX3sxfSwgcV97Mn0gLi4uIHFfe259PiIsImZvcm11bGFfaWQiOiJFUTAwNiIsImtpbmQiOiJtYXRoIiwibGF0ZXhfc2hhMjU2IjoiNzU3NDczYWYwODA2ZDEyYjY4NGQ1YzZiN2ZmYzMxMWIwYjI5ZTMzOTI0MDE2YjYyNmVlZmNkZGIyYWQ3Y2E3YyIsIm1vZGUiOiJpbmxpbmUiLCJvbW1sX3NoYTI1NiI6IjFmMjhjNDhhMDVhMzk0MWYyNGNhYjk2YWJlNDJlYTI3NDhjYzM5ZjBjYmM5NjA0ZGQwYTE5NGQyMjJmM2E4MjYiLCJzZW1hbnRpY19vbW1sX3Byb2ZpbGUiOiJvZmZpY2UtbWF0aC1zZW1hbnRpYy12MiIsInNlbWFudGljX29tbWxfc2hhMjU2IjoiYTA2MWY5OTI2ODY1YzlmOTRlMWI0Mzg5Mzc2Zjc3ODhlZGZlZDkzNTI2MzE5ZGE1OGQzZGIyM2U3NDFkYTY5ZSJ9XSwiZm9ybXVsYXMiOlt7ImNhbm9uaWNhbF9sYXRleCI6IjxxX3sxfSwgcV97Mn0gLi4uIHFfe259PiIsImZvcm11bGFfaWQiOiJFUTAwNiIsImxhdGV4X3NoYTI1NiI6Ijc1NzQ3M2FmMDgwNmQxMmI2ODRkNWM2YjdmZmMzMTFiMGIyOWUzMzkyNDAxNmI2MjZlZWZjZGRiMmFkN2NhN2MiLCJtb2RlIjoiaW5saW5lIiwib21tbF9zaGEyNTYiOiIxZjI4YzQ4YTA1YTM5NDFmMjRjYWI5NmFiZTQyZWEyNzQ4Y2MzOWYwY2JjOTYwNGRkMGExOTRkMjIyZjNhODI2Iiwic2VtYW50aWNfb21tbF9wcm9maWxlIjoib2ZmaWNlLW1hdGgtc2VtYW50aWMtdjIiLCJzZW1hbnRpY19vbW1sX3NoYTI1NiI6ImEwNjFmOTkyNjg2NWM5Zjk0ZTFiNDM4OTM3NmY3Nzg4ZWRmZWQ5MzUyNjMxOWRhNThkM2RiMjNlNzQxZGE2OWUifV0sImtpbmQiOiJuYXRpdmVfb2ZmaWNlX21hdGgiLCJwbGFjZWhvbGRlcl9uYW1lIjoibWF0aDowMDYiLCJzY2hlbWFfdmVyc2lvbiI6IjEuMCJ9"/>
+              <p:cNvSpPr txBox="1"/>
+              <p:nvPr/>
+            </p:nvSpPr>
+            <p:spPr>
+              <a:xfrm>
+                <a:off x="10116693" y="4751546"/>
+                <a:ext cx="1016889" cy="202406"/>
+              </a:xfrm>
+              <a:prstGeom prst="rect">
+                <a:avLst/>
+              </a:prstGeom>
+              <a:noFill/>
+              <a:effectLst/>
+            </p:spPr>
+            <p:txBody>
+              <a:bodyPr wrap="none" anchor="t" lIns="0" rIns="0" tIns="0" bIns="0">
+                <a:spAutoFit/>
+              </a:bodyPr>
+              <a:lstStyle/>
+              <a:p>
+                <a:pPr algn="ctr"/>
+                <a:r>
+                  <a:rPr lang="en-US" dirty="0" sz="1275">
+                    <a:solidFill>
+                      <a:srgbClr val="000000"/>
+                    </a:solidFill>
+                  </a:rPr>
+                  <a:t>\(&lt;q_{1}, q_{2} ... q_{n}&gt;\)</a:t>
+                </a:r>
+                <a:endParaRPr lang="en-US" dirty="0" sz="1275">
+                  <a:solidFill>
+                    <a:srgbClr val="000000"/>
+                  </a:solidFill>
+                </a:endParaRPr>
+              </a:p>
+            </p:txBody>
+          </p:sp>
+        </mc:Fallback>
+      </mc:AlternateContent>
       <p:sp>
         <p:nvSpPr>
           <p:cNvPr id="196" name="TextBox 195"/>
@@ -10842,6 +11485,10 @@
             </a:solidFill>
           </a:ln>
         </p:spPr>
+        <p:txBody>
+          <a:bodyPr/>
+          <a:p/>
+        </p:txBody>
       </p:sp>
       <p:sp>
         <p:nvSpPr>
@@ -10881,6 +11528,10 @@
             </a:solidFill>
           </a:ln>
         </p:spPr>
+        <p:txBody>
+          <a:bodyPr/>
+          <a:p/>
+        </p:txBody>
       </p:sp>
       <p:sp>
         <p:nvSpPr>
@@ -10953,6 +11604,10 @@
             </a:solidFill>
           </a:ln>
         </p:spPr>
+        <p:txBody>
+          <a:bodyPr/>
+          <a:p/>
+        </p:txBody>
       </p:sp>
       <p:sp>
         <p:nvSpPr>
@@ -10992,6 +11647,10 @@
             </a:solidFill>
           </a:ln>
         </p:spPr>
+        <p:txBody>
+          <a:bodyPr/>
+          <a:p/>
+        </p:txBody>
       </p:sp>
       <p:sp>
         <p:nvSpPr>
